--- a/HW12/9. Формы. Фреймы.pptx
+++ b/HW12/9. Формы. Фреймы.pptx
@@ -13397,7 +13397,7 @@
       </p:grpSpPr>
       <p:pic>
         <p:nvPicPr>
-          <p:cNvPr id="4" name="Рисунок 3" descr="логотип STEP ACADEMY (белый).png"/>
+          <p:cNvPr id="4" name="Рисунок 3" descr=""/>
           <p:cNvPicPr>
             <a:picLocks noChangeAspect="1"/>
           </p:cNvPicPr>
@@ -14061,7 +14061,7 @@
       </p:sp>
       <p:sp>
         <p:nvSpPr>
-          <p:cNvPr id="5122" name="AutoShape 2" descr="https://metanit.com/web/html5/pics/2.27.png"/>
+          <p:cNvPr id="5122" name="AutoShape 2" descr=""/>
           <p:cNvSpPr>
             <a:spLocks noChangeAspect="1" noChangeArrowheads="1"/>
           </p:cNvSpPr>
@@ -14091,7 +14091,7 @@
       </p:sp>
       <p:sp>
         <p:nvSpPr>
-          <p:cNvPr id="5124" name="AutoShape 4" descr="https://metanit.com/web/html5/pics/2.27.png"/>
+          <p:cNvPr id="5124" name="AutoShape 4" descr=""/>
           <p:cNvSpPr>
             <a:spLocks noChangeAspect="1" noChangeArrowheads="1"/>
           </p:cNvSpPr>
@@ -14121,7 +14121,7 @@
       </p:sp>
       <p:sp>
         <p:nvSpPr>
-          <p:cNvPr id="5126" name="AutoShape 6" descr="https://metanit.com/web/html5/pics/2.27.png"/>
+          <p:cNvPr id="5126" name="AutoShape 6" descr=""/>
           <p:cNvSpPr>
             <a:spLocks noChangeAspect="1" noChangeArrowheads="1"/>
           </p:cNvSpPr>
@@ -14151,7 +14151,7 @@
       </p:sp>
       <p:sp>
         <p:nvSpPr>
-          <p:cNvPr id="5128" name="AutoShape 8" descr="https://metanit.com/web/html5/pics/2.25.png"/>
+          <p:cNvPr id="5128" name="AutoShape 8" descr=""/>
           <p:cNvSpPr>
             <a:spLocks noChangeAspect="1" noChangeArrowheads="1"/>
           </p:cNvSpPr>
@@ -14386,7 +14386,7 @@
       </p:sp>
       <p:sp>
         <p:nvSpPr>
-          <p:cNvPr id="5122" name="AutoShape 2" descr="https://metanit.com/web/html5/pics/2.27.png"/>
+          <p:cNvPr id="5122" name="AutoShape 2" descr=""/>
           <p:cNvSpPr>
             <a:spLocks noChangeAspect="1" noChangeArrowheads="1"/>
           </p:cNvSpPr>
@@ -14416,7 +14416,7 @@
       </p:sp>
       <p:sp>
         <p:nvSpPr>
-          <p:cNvPr id="5124" name="AutoShape 4" descr="https://metanit.com/web/html5/pics/2.27.png"/>
+          <p:cNvPr id="5124" name="AutoShape 4" descr=""/>
           <p:cNvSpPr>
             <a:spLocks noChangeAspect="1" noChangeArrowheads="1"/>
           </p:cNvSpPr>
@@ -14446,7 +14446,7 @@
       </p:sp>
       <p:sp>
         <p:nvSpPr>
-          <p:cNvPr id="5126" name="AutoShape 6" descr="https://metanit.com/web/html5/pics/2.27.png"/>
+          <p:cNvPr id="5126" name="AutoShape 6" descr=""/>
           <p:cNvSpPr>
             <a:spLocks noChangeAspect="1" noChangeArrowheads="1"/>
           </p:cNvSpPr>
@@ -14476,7 +14476,7 @@
       </p:sp>
       <p:sp>
         <p:nvSpPr>
-          <p:cNvPr id="5128" name="AutoShape 8" descr="https://metanit.com/web/html5/pics/2.25.png"/>
+          <p:cNvPr id="5128" name="AutoShape 8" descr=""/>
           <p:cNvSpPr>
             <a:spLocks noChangeAspect="1" noChangeArrowheads="1"/>
           </p:cNvSpPr>
@@ -14678,7 +14678,7 @@
       </p:sp>
       <p:sp>
         <p:nvSpPr>
-          <p:cNvPr id="5122" name="AutoShape 2" descr="https://metanit.com/web/html5/pics/2.27.png"/>
+          <p:cNvPr id="5122" name="AutoShape 2" descr=""/>
           <p:cNvSpPr>
             <a:spLocks noChangeAspect="1" noChangeArrowheads="1"/>
           </p:cNvSpPr>
@@ -14708,7 +14708,7 @@
       </p:sp>
       <p:sp>
         <p:nvSpPr>
-          <p:cNvPr id="5124" name="AutoShape 4" descr="https://metanit.com/web/html5/pics/2.27.png"/>
+          <p:cNvPr id="5124" name="AutoShape 4" descr=""/>
           <p:cNvSpPr>
             <a:spLocks noChangeAspect="1" noChangeArrowheads="1"/>
           </p:cNvSpPr>
@@ -14738,7 +14738,7 @@
       </p:sp>
       <p:sp>
         <p:nvSpPr>
-          <p:cNvPr id="5126" name="AutoShape 6" descr="https://metanit.com/web/html5/pics/2.27.png"/>
+          <p:cNvPr id="5126" name="AutoShape 6" descr=""/>
           <p:cNvSpPr>
             <a:spLocks noChangeAspect="1" noChangeArrowheads="1"/>
           </p:cNvSpPr>
@@ -14768,7 +14768,7 @@
       </p:sp>
       <p:sp>
         <p:nvSpPr>
-          <p:cNvPr id="5128" name="AutoShape 8" descr="https://metanit.com/web/html5/pics/2.25.png"/>
+          <p:cNvPr id="5128" name="AutoShape 8" descr=""/>
           <p:cNvSpPr>
             <a:spLocks noChangeAspect="1" noChangeArrowheads="1"/>
           </p:cNvSpPr>
@@ -14982,7 +14982,7 @@
       </p:sp>
       <p:sp>
         <p:nvSpPr>
-          <p:cNvPr id="5122" name="AutoShape 2" descr="https://metanit.com/web/html5/pics/2.27.png"/>
+          <p:cNvPr id="5122" name="AutoShape 2" descr=""/>
           <p:cNvSpPr>
             <a:spLocks noChangeAspect="1" noChangeArrowheads="1"/>
           </p:cNvSpPr>
@@ -15012,7 +15012,7 @@
       </p:sp>
       <p:sp>
         <p:nvSpPr>
-          <p:cNvPr id="5124" name="AutoShape 4" descr="https://metanit.com/web/html5/pics/2.27.png"/>
+          <p:cNvPr id="5124" name="AutoShape 4" descr=""/>
           <p:cNvSpPr>
             <a:spLocks noChangeAspect="1" noChangeArrowheads="1"/>
           </p:cNvSpPr>
@@ -15042,7 +15042,7 @@
       </p:sp>
       <p:sp>
         <p:nvSpPr>
-          <p:cNvPr id="5126" name="AutoShape 6" descr="https://metanit.com/web/html5/pics/2.27.png"/>
+          <p:cNvPr id="5126" name="AutoShape 6" descr=""/>
           <p:cNvSpPr>
             <a:spLocks noChangeAspect="1" noChangeArrowheads="1"/>
           </p:cNvSpPr>
@@ -15072,7 +15072,7 @@
       </p:sp>
       <p:sp>
         <p:nvSpPr>
-          <p:cNvPr id="5128" name="AutoShape 8" descr="https://metanit.com/web/html5/pics/2.25.png"/>
+          <p:cNvPr id="5128" name="AutoShape 8" descr=""/>
           <p:cNvSpPr>
             <a:spLocks noChangeAspect="1" noChangeArrowheads="1"/>
           </p:cNvSpPr>

--- a/HW12/9. Формы. Фреймы.pptx
+++ b/HW12/9. Формы. Фреймы.pptx
@@ -13481,7 +13481,7 @@
                   </a:schemeClr>
                 </a:solidFill>
               </a:rPr>
-              <a:t>Зуев Александр</a:t>
+              <a:t/>
             </a:r>
             <a:endParaRPr lang="ru-RU" sz="3600" b="1" i="1" dirty="0">
               <a:ln w="50800"/>
